--- a/docs/poster/variants/v32.pptx
+++ b/docs/poster/variants/v32.pptx
@@ -3503,6 +3503,90 @@
               </a:spcAft>
             </a:pPr>
             <a:r>
+              <a:rPr sz="6200" b="1">
+                <a:solidFill>
+                  <a:srgbClr val="1C6FB5"/>
+                </a:solidFill>
+                <a:latin typeface="Times New Roman"/>
+              </a:rPr>
+              <a:t>14</a:t>
+            </a:r>
+          </a:p>
+        </p:txBody>
+      </p:sp>
+      <p:sp>
+        <p:nvSpPr>
+          <p:cNvPr id="12" name="TextBox 11"/>
+          <p:cNvSpPr txBox="1"/>
+          <p:nvPr/>
+        </p:nvSpPr>
+        <p:spPr>
+          <a:xfrm>
+            <a:off x="731520" y="9954768"/>
+            <a:ext cx="10607040" cy="365760"/>
+          </a:xfrm>
+          <a:prstGeom prst="rect">
+            <a:avLst/>
+          </a:prstGeom>
+          <a:noFill/>
+        </p:spPr>
+        <p:txBody>
+          <a:bodyPr wrap="square" lIns="0" rIns="0" tIns="0" bIns="0">
+            <a:spAutoFit/>
+          </a:bodyPr>
+          <a:lstStyle/>
+          <a:p>
+            <a:pPr algn="l">
+              <a:lnSpc>
+                <a:spcPct val="122000"/>
+              </a:lnSpc>
+              <a:spcAft>
+                <a:spcPts val="600"/>
+              </a:spcAft>
+            </a:pPr>
+            <a:r>
+              <a:rPr sz="1600" b="0">
+                <a:solidFill>
+                  <a:srgbClr val="556575"/>
+                </a:solidFill>
+                <a:latin typeface="Arial"/>
+              </a:rPr>
+              <a:t>analysis tools the planner can choose from</a:t>
+            </a:r>
+          </a:p>
+        </p:txBody>
+      </p:sp>
+      <p:sp>
+        <p:nvSpPr>
+          <p:cNvPr id="13" name="TextBox 12"/>
+          <p:cNvSpPr txBox="1"/>
+          <p:nvPr/>
+        </p:nvSpPr>
+        <p:spPr>
+          <a:xfrm>
+            <a:off x="731520" y="10425176"/>
+            <a:ext cx="10607040" cy="365760"/>
+          </a:xfrm>
+          <a:prstGeom prst="rect">
+            <a:avLst/>
+          </a:prstGeom>
+          <a:noFill/>
+        </p:spPr>
+        <p:txBody>
+          <a:bodyPr wrap="square" lIns="0" rIns="0" tIns="0" bIns="0">
+            <a:spAutoFit/>
+          </a:bodyPr>
+          <a:lstStyle/>
+          <a:p>
+            <a:pPr algn="l">
+              <a:lnSpc>
+                <a:spcPct val="95000"/>
+              </a:lnSpc>
+              <a:spcAft>
+                <a:spcPts val="0"/>
+              </a:spcAft>
+            </a:pPr>
+            <a:r>
               <a:rPr sz="3400" b="1">
                 <a:solidFill>
                   <a:srgbClr val="14314E"/>
@@ -3516,13 +3600,13 @@
       </p:sp>
       <p:sp>
         <p:nvSpPr>
-          <p:cNvPr id="12" name="Rectangle 11"/>
+          <p:cNvPr id="14" name="Rectangle 13"/>
           <p:cNvSpPr/>
           <p:nvPr/>
         </p:nvSpPr>
         <p:spPr>
           <a:xfrm>
-            <a:off x="731520" y="9712960"/>
+            <a:off x="731520" y="10986516"/>
             <a:ext cx="10607040" cy="27432"/>
           </a:xfrm>
           <a:prstGeom prst="rect">
@@ -3560,13 +3644,13 @@
       </p:sp>
       <p:sp>
         <p:nvSpPr>
-          <p:cNvPr id="13" name="TextBox 12"/>
+          <p:cNvPr id="15" name="TextBox 14"/>
           <p:cNvSpPr txBox="1"/>
           <p:nvPr/>
         </p:nvSpPr>
         <p:spPr>
           <a:xfrm>
-            <a:off x="731520" y="10042144"/>
+            <a:off x="731520" y="11315700"/>
             <a:ext cx="10607040" cy="365760"/>
           </a:xfrm>
           <a:prstGeom prst="rect">
@@ -3602,13 +3686,13 @@
       </p:sp>
       <p:sp>
         <p:nvSpPr>
-          <p:cNvPr id="14" name="TextBox 13"/>
+          <p:cNvPr id="16" name="TextBox 15"/>
           <p:cNvSpPr txBox="1"/>
           <p:nvPr/>
         </p:nvSpPr>
         <p:spPr>
           <a:xfrm>
-            <a:off x="731520" y="11843511"/>
+            <a:off x="731520" y="13117068"/>
             <a:ext cx="10607040" cy="365760"/>
           </a:xfrm>
           <a:prstGeom prst="rect">
@@ -3631,6 +3715,90 @@
               </a:spcAft>
             </a:pPr>
             <a:r>
+              <a:rPr sz="6200" b="1">
+                <a:solidFill>
+                  <a:srgbClr val="1C6FB5"/>
+                </a:solidFill>
+                <a:latin typeface="Times New Roman"/>
+              </a:rPr>
+              <a:t>92</a:t>
+            </a:r>
+          </a:p>
+        </p:txBody>
+      </p:sp>
+      <p:sp>
+        <p:nvSpPr>
+          <p:cNvPr id="17" name="TextBox 16"/>
+          <p:cNvSpPr txBox="1"/>
+          <p:nvPr/>
+        </p:nvSpPr>
+        <p:spPr>
+          <a:xfrm>
+            <a:off x="731520" y="13920216"/>
+            <a:ext cx="10607040" cy="365760"/>
+          </a:xfrm>
+          <a:prstGeom prst="rect">
+            <a:avLst/>
+          </a:prstGeom>
+          <a:noFill/>
+        </p:spPr>
+        <p:txBody>
+          <a:bodyPr wrap="square" lIns="0" rIns="0" tIns="0" bIns="0">
+            <a:spAutoFit/>
+          </a:bodyPr>
+          <a:lstStyle/>
+          <a:p>
+            <a:pPr algn="l">
+              <a:lnSpc>
+                <a:spcPct val="122000"/>
+              </a:lnSpc>
+              <a:spcAft>
+                <a:spcPts val="600"/>
+              </a:spcAft>
+            </a:pPr>
+            <a:r>
+              <a:rPr sz="1600" b="0">
+                <a:solidFill>
+                  <a:srgbClr val="556575"/>
+                </a:solidFill>
+                <a:latin typeface="Arial"/>
+              </a:rPr>
+              <a:t>questions asked of a dataset so far</a:t>
+            </a:r>
+          </a:p>
+        </p:txBody>
+      </p:sp>
+      <p:sp>
+        <p:nvSpPr>
+          <p:cNvPr id="18" name="TextBox 17"/>
+          <p:cNvSpPr txBox="1"/>
+          <p:nvPr/>
+        </p:nvSpPr>
+        <p:spPr>
+          <a:xfrm>
+            <a:off x="731520" y="14390624"/>
+            <a:ext cx="10607040" cy="365760"/>
+          </a:xfrm>
+          <a:prstGeom prst="rect">
+            <a:avLst/>
+          </a:prstGeom>
+          <a:noFill/>
+        </p:spPr>
+        <p:txBody>
+          <a:bodyPr wrap="square" lIns="0" rIns="0" tIns="0" bIns="0">
+            <a:spAutoFit/>
+          </a:bodyPr>
+          <a:lstStyle/>
+          <a:p>
+            <a:pPr algn="l">
+              <a:lnSpc>
+                <a:spcPct val="95000"/>
+              </a:lnSpc>
+              <a:spcAft>
+                <a:spcPts val="0"/>
+              </a:spcAft>
+            </a:pPr>
+            <a:r>
               <a:rPr sz="3400" b="1">
                 <a:solidFill>
                   <a:srgbClr val="14314E"/>
@@ -3644,13 +3812,13 @@
       </p:sp>
       <p:sp>
         <p:nvSpPr>
-          <p:cNvPr id="15" name="Rectangle 14"/>
+          <p:cNvPr id="19" name="Rectangle 18"/>
           <p:cNvSpPr/>
           <p:nvPr/>
         </p:nvSpPr>
         <p:spPr>
           <a:xfrm>
-            <a:off x="731520" y="12404851"/>
+            <a:off x="731520" y="14951964"/>
             <a:ext cx="10607040" cy="27432"/>
           </a:xfrm>
           <a:prstGeom prst="rect">
@@ -3688,13 +3856,13 @@
       </p:sp>
       <p:sp>
         <p:nvSpPr>
-          <p:cNvPr id="16" name="TextBox 15"/>
+          <p:cNvPr id="20" name="TextBox 19"/>
           <p:cNvSpPr txBox="1"/>
           <p:nvPr/>
         </p:nvSpPr>
         <p:spPr>
           <a:xfrm>
-            <a:off x="731520" y="12734035"/>
+            <a:off x="731520" y="15281148"/>
             <a:ext cx="10607040" cy="365760"/>
           </a:xfrm>
           <a:prstGeom prst="rect">
@@ -3730,13 +3898,13 @@
       </p:sp>
       <p:sp>
         <p:nvSpPr>
-          <p:cNvPr id="17" name="TextBox 16"/>
+          <p:cNvPr id="21" name="TextBox 20"/>
           <p:cNvSpPr txBox="1"/>
           <p:nvPr/>
         </p:nvSpPr>
         <p:spPr>
           <a:xfrm>
-            <a:off x="731520" y="14535403"/>
+            <a:off x="731520" y="17082516"/>
             <a:ext cx="10607040" cy="365760"/>
           </a:xfrm>
           <a:prstGeom prst="rect">
@@ -3772,13 +3940,13 @@
       </p:sp>
       <p:sp>
         <p:nvSpPr>
-          <p:cNvPr id="18" name="Rectangle 17"/>
+          <p:cNvPr id="22" name="Rectangle 21"/>
           <p:cNvSpPr/>
           <p:nvPr/>
         </p:nvSpPr>
         <p:spPr>
           <a:xfrm>
-            <a:off x="731520" y="15096743"/>
+            <a:off x="731520" y="17643856"/>
             <a:ext cx="10607040" cy="27432"/>
           </a:xfrm>
           <a:prstGeom prst="rect">
@@ -3816,13 +3984,13 @@
       </p:sp>
       <p:sp>
         <p:nvSpPr>
-          <p:cNvPr id="19" name="TextBox 18"/>
+          <p:cNvPr id="23" name="TextBox 22"/>
           <p:cNvSpPr txBox="1"/>
           <p:nvPr/>
         </p:nvSpPr>
         <p:spPr>
           <a:xfrm>
-            <a:off x="731520" y="15425927"/>
+            <a:off x="731520" y="17973040"/>
             <a:ext cx="10607040" cy="365760"/>
           </a:xfrm>
           <a:prstGeom prst="rect">
@@ -3851,20 +4019,20 @@
                 </a:solidFill>
                 <a:latin typeface="Arial"/>
               </a:rPr>
-              <a:t>A new robot needs a project, an API key and a session start. The ingest contract is the same for every vehicle: start a session, post sensor batches and frames while driving, stop. The platform does not care what the robot is. The Unitree humanoid's project exists on this basis and is waiting on its first upload.</a:t>
-            </a:r>
-          </a:p>
-        </p:txBody>
-      </p:sp>
-      <p:sp>
-        <p:nvSpPr>
-          <p:cNvPr id="20" name="TextBox 19"/>
+              <a:t>A new robot needs a project, an API key and a session start. The ingest contract is the same for every vehicle: open a session, post sensor batches and frames while driving, stop. The platform does not care what the robot is. Empty projects for a mobile robot and a humanoid already sit on it, waiting for a first upload.</a:t>
+            </a:r>
+          </a:p>
+        </p:txBody>
+      </p:sp>
+      <p:sp>
+        <p:nvSpPr>
+          <p:cNvPr id="24" name="TextBox 23"/>
           <p:cNvSpPr txBox="1"/>
           <p:nvPr/>
         </p:nvSpPr>
         <p:spPr>
           <a:xfrm>
-            <a:off x="731520" y="17227296"/>
+            <a:off x="731520" y="19774408"/>
             <a:ext cx="10607040" cy="365760"/>
           </a:xfrm>
           <a:prstGeom prst="rect">
@@ -3900,13 +4068,13 @@
       </p:sp>
       <p:sp>
         <p:nvSpPr>
-          <p:cNvPr id="21" name="Rectangle 20"/>
+          <p:cNvPr id="25" name="Rectangle 24"/>
           <p:cNvSpPr/>
           <p:nvPr/>
         </p:nvSpPr>
         <p:spPr>
           <a:xfrm>
-            <a:off x="731520" y="17788636"/>
+            <a:off x="731520" y="20335748"/>
             <a:ext cx="10607040" cy="27432"/>
           </a:xfrm>
           <a:prstGeom prst="rect">
@@ -3944,13 +4112,13 @@
       </p:sp>
       <p:sp>
         <p:nvSpPr>
-          <p:cNvPr id="22" name="TextBox 21"/>
+          <p:cNvPr id="26" name="TextBox 25"/>
           <p:cNvSpPr txBox="1"/>
           <p:nvPr/>
         </p:nvSpPr>
         <p:spPr>
           <a:xfrm>
-            <a:off x="731520" y="18117820"/>
+            <a:off x="731520" y="20664932"/>
             <a:ext cx="10607040" cy="365760"/>
           </a:xfrm>
           <a:prstGeom prst="rect">
@@ -3986,13 +4154,13 @@
       </p:sp>
       <p:sp>
         <p:nvSpPr>
-          <p:cNvPr id="23" name="TextBox 22"/>
+          <p:cNvPr id="27" name="TextBox 26"/>
           <p:cNvSpPr txBox="1"/>
           <p:nvPr/>
         </p:nvSpPr>
         <p:spPr>
           <a:xfrm>
-            <a:off x="731520" y="20229068"/>
+            <a:off x="731520" y="22776180"/>
             <a:ext cx="10607040" cy="365760"/>
           </a:xfrm>
           <a:prstGeom prst="rect">
@@ -4028,13 +4196,13 @@
       </p:sp>
       <p:sp>
         <p:nvSpPr>
-          <p:cNvPr id="24" name="Rectangle 23"/>
+          <p:cNvPr id="28" name="Rectangle 27"/>
           <p:cNvSpPr/>
           <p:nvPr/>
         </p:nvSpPr>
         <p:spPr>
           <a:xfrm>
-            <a:off x="731520" y="20790408"/>
+            <a:off x="731520" y="23337520"/>
             <a:ext cx="10607040" cy="27432"/>
           </a:xfrm>
           <a:prstGeom prst="rect">
@@ -4072,13 +4240,13 @@
       </p:sp>
       <p:sp>
         <p:nvSpPr>
-          <p:cNvPr id="25" name="TextBox 24"/>
+          <p:cNvPr id="29" name="TextBox 28"/>
           <p:cNvSpPr txBox="1"/>
           <p:nvPr/>
         </p:nvSpPr>
         <p:spPr>
           <a:xfrm>
-            <a:off x="731520" y="21119592"/>
+            <a:off x="731520" y="23666704"/>
             <a:ext cx="10607040" cy="365760"/>
           </a:xfrm>
           <a:prstGeom prst="rect">
@@ -4114,7 +4282,7 @@
       </p:sp>
       <p:sp>
         <p:nvSpPr>
-          <p:cNvPr id="26" name="TextBox 25"/>
+          <p:cNvPr id="30" name="TextBox 29"/>
           <p:cNvSpPr txBox="1"/>
           <p:nvPr/>
         </p:nvSpPr>
@@ -4156,7 +4324,7 @@
       </p:sp>
       <p:sp>
         <p:nvSpPr>
-          <p:cNvPr id="27" name="Rectangle 26"/>
+          <p:cNvPr id="31" name="Rectangle 30"/>
           <p:cNvSpPr/>
           <p:nvPr/>
         </p:nvSpPr>
@@ -4200,7 +4368,7 @@
       </p:sp>
       <p:sp>
         <p:nvSpPr>
-          <p:cNvPr id="28" name="TextBox 27"/>
+          <p:cNvPr id="32" name="TextBox 31"/>
           <p:cNvSpPr txBox="1"/>
           <p:nvPr/>
         </p:nvSpPr>
@@ -4235,14 +4403,14 @@
                 </a:solidFill>
                 <a:latin typeface="Arial"/>
               </a:rPr>
-              <a:t>Robot 241 is a tracked rover that drives crop rows and streams camera, GPS and two IMUs. The laser cart carries the weeder: a galvanometer laser, a down camera over the work zone and a forward camera. A Unitree humanoid has a project and has uploaded nothing yet. Between them the two ground vehicles have recorded 2,686 frames in 26 drives.</a:t>
-            </a:r>
-          </a:p>
-        </p:txBody>
-      </p:sp>
-      <p:sp>
-        <p:nvSpPr>
-          <p:cNvPr id="29" name="TextBox 28"/>
+              <a:t>Robot 241 is a tracked rover that drives crop rows and streams camera, GPS and two IMUs. The laser cart carries the weeder: a galvanometer laser, a down camera over the work zone and a forward camera. Ten projects sit on the platform and two of them have a robot reporting into them. Between those two vehicles, 2,686 frames in 26 drives.</a:t>
+            </a:r>
+          </a:p>
+        </p:txBody>
+      </p:sp>
+      <p:sp>
+        <p:nvSpPr>
+          <p:cNvPr id="33" name="TextBox 32"/>
           <p:cNvSpPr txBox="1"/>
           <p:nvPr/>
         </p:nvSpPr>
@@ -4284,7 +4452,7 @@
       </p:sp>
       <p:sp>
         <p:nvSpPr>
-          <p:cNvPr id="30" name="Rectangle 29"/>
+          <p:cNvPr id="34" name="Rectangle 33"/>
           <p:cNvSpPr/>
           <p:nvPr/>
         </p:nvSpPr>
@@ -4328,7 +4496,7 @@
       </p:sp>
       <p:sp>
         <p:nvSpPr>
-          <p:cNvPr id="31" name="TextBox 30"/>
+          <p:cNvPr id="35" name="TextBox 34"/>
           <p:cNvSpPr txBox="1"/>
           <p:nvPr/>
         </p:nvSpPr>
@@ -4370,7 +4538,7 @@
       </p:sp>
       <p:sp>
         <p:nvSpPr>
-          <p:cNvPr id="32" name="TextBox 31"/>
+          <p:cNvPr id="36" name="TextBox 35"/>
           <p:cNvSpPr txBox="1"/>
           <p:nvPr/>
         </p:nvSpPr>
@@ -4412,7 +4580,7 @@
       </p:sp>
       <p:sp>
         <p:nvSpPr>
-          <p:cNvPr id="33" name="Rectangle 32"/>
+          <p:cNvPr id="37" name="Rectangle 36"/>
           <p:cNvSpPr/>
           <p:nvPr/>
         </p:nvSpPr>
@@ -4456,7 +4624,7 @@
       </p:sp>
       <p:sp>
         <p:nvSpPr>
-          <p:cNvPr id="34" name="TextBox 33"/>
+          <p:cNvPr id="38" name="TextBox 37"/>
           <p:cNvSpPr txBox="1"/>
           <p:nvPr/>
         </p:nvSpPr>
@@ -4498,7 +4666,7 @@
       </p:sp>
       <p:sp>
         <p:nvSpPr>
-          <p:cNvPr id="35" name="TextBox 34"/>
+          <p:cNvPr id="39" name="TextBox 38"/>
           <p:cNvSpPr txBox="1"/>
           <p:nvPr/>
         </p:nvSpPr>
@@ -4540,7 +4708,7 @@
       </p:sp>
       <p:sp>
         <p:nvSpPr>
-          <p:cNvPr id="36" name="Rectangle 35"/>
+          <p:cNvPr id="40" name="Rectangle 39"/>
           <p:cNvSpPr/>
           <p:nvPr/>
         </p:nvSpPr>
@@ -4584,7 +4752,7 @@
       </p:sp>
       <p:sp>
         <p:nvSpPr>
-          <p:cNvPr id="37" name="TextBox 36"/>
+          <p:cNvPr id="41" name="TextBox 40"/>
           <p:cNvSpPr txBox="1"/>
           <p:nvPr/>
         </p:nvSpPr>
@@ -4626,7 +4794,7 @@
       </p:sp>
       <p:sp>
         <p:nvSpPr>
-          <p:cNvPr id="38" name="TextBox 37"/>
+          <p:cNvPr id="42" name="TextBox 41"/>
           <p:cNvSpPr txBox="1"/>
           <p:nvPr/>
         </p:nvSpPr>
@@ -4668,7 +4836,7 @@
       </p:sp>
       <p:sp>
         <p:nvSpPr>
-          <p:cNvPr id="39" name="Rectangle 38"/>
+          <p:cNvPr id="43" name="Rectangle 42"/>
           <p:cNvSpPr/>
           <p:nvPr/>
         </p:nvSpPr>
@@ -4712,7 +4880,7 @@
       </p:sp>
       <p:sp>
         <p:nvSpPr>
-          <p:cNvPr id="40" name="TextBox 39"/>
+          <p:cNvPr id="44" name="TextBox 43"/>
           <p:cNvSpPr txBox="1"/>
           <p:nvPr/>
         </p:nvSpPr>
@@ -4754,7 +4922,7 @@
       </p:sp>
       <p:sp>
         <p:nvSpPr>
-          <p:cNvPr id="41" name="TextBox 40"/>
+          <p:cNvPr id="45" name="TextBox 44"/>
           <p:cNvSpPr txBox="1"/>
           <p:nvPr/>
         </p:nvSpPr>
@@ -4783,6 +4951,90 @@
               </a:spcAft>
             </a:pPr>
             <a:r>
+              <a:rPr sz="6200" b="1">
+                <a:solidFill>
+                  <a:srgbClr val="1C6FB5"/>
+                </a:solidFill>
+                <a:latin typeface="Times New Roman"/>
+              </a:rPr>
+              <a:t>162</a:t>
+            </a:r>
+          </a:p>
+        </p:txBody>
+      </p:sp>
+      <p:sp>
+        <p:nvSpPr>
+          <p:cNvPr id="46" name="TextBox 45"/>
+          <p:cNvSpPr txBox="1"/>
+          <p:nvPr/>
+        </p:nvSpPr>
+        <p:spPr>
+          <a:xfrm>
+            <a:off x="11704320" y="20102576"/>
+            <a:ext cx="9989820" cy="365760"/>
+          </a:xfrm>
+          <a:prstGeom prst="rect">
+            <a:avLst/>
+          </a:prstGeom>
+          <a:noFill/>
+        </p:spPr>
+        <p:txBody>
+          <a:bodyPr wrap="square" lIns="0" rIns="0" tIns="0" bIns="0">
+            <a:spAutoFit/>
+          </a:bodyPr>
+          <a:lstStyle/>
+          <a:p>
+            <a:pPr algn="l">
+              <a:lnSpc>
+                <a:spcPct val="122000"/>
+              </a:lnSpc>
+              <a:spcAft>
+                <a:spcPts val="600"/>
+              </a:spcAft>
+            </a:pPr>
+            <a:r>
+              <a:rPr sz="1600" b="0">
+                <a:solidFill>
+                  <a:srgbClr val="556575"/>
+                </a:solidFill>
+                <a:latin typeface="Arial"/>
+              </a:rPr>
+              <a:t>real failures frozen as a benchmark</a:t>
+            </a:r>
+          </a:p>
+        </p:txBody>
+      </p:sp>
+      <p:sp>
+        <p:nvSpPr>
+          <p:cNvPr id="47" name="TextBox 46"/>
+          <p:cNvSpPr txBox="1"/>
+          <p:nvPr/>
+        </p:nvSpPr>
+        <p:spPr>
+          <a:xfrm>
+            <a:off x="11704320" y="20572984"/>
+            <a:ext cx="9989820" cy="365760"/>
+          </a:xfrm>
+          <a:prstGeom prst="rect">
+            <a:avLst/>
+          </a:prstGeom>
+          <a:noFill/>
+        </p:spPr>
+        <p:txBody>
+          <a:bodyPr wrap="square" lIns="0" rIns="0" tIns="0" bIns="0">
+            <a:spAutoFit/>
+          </a:bodyPr>
+          <a:lstStyle/>
+          <a:p>
+            <a:pPr algn="l">
+              <a:lnSpc>
+                <a:spcPct val="95000"/>
+              </a:lnSpc>
+              <a:spcAft>
+                <a:spcPts val="0"/>
+              </a:spcAft>
+            </a:pPr>
+            <a:r>
               <a:rPr sz="3400" b="1">
                 <a:solidFill>
                   <a:srgbClr val="14314E"/>
@@ -4796,13 +5048,13 @@
       </p:sp>
       <p:sp>
         <p:nvSpPr>
-          <p:cNvPr id="42" name="Rectangle 41"/>
+          <p:cNvPr id="48" name="Rectangle 47"/>
           <p:cNvSpPr/>
           <p:nvPr/>
         </p:nvSpPr>
         <p:spPr>
           <a:xfrm>
-            <a:off x="11704320" y="19860768"/>
+            <a:off x="11704320" y="21134324"/>
             <a:ext cx="9989820" cy="27432"/>
           </a:xfrm>
           <a:prstGeom prst="rect">
@@ -4840,13 +5092,13 @@
       </p:sp>
       <p:sp>
         <p:nvSpPr>
-          <p:cNvPr id="43" name="TextBox 42"/>
+          <p:cNvPr id="49" name="TextBox 48"/>
           <p:cNvSpPr txBox="1"/>
           <p:nvPr/>
         </p:nvSpPr>
         <p:spPr>
           <a:xfrm>
-            <a:off x="11704320" y="20189952"/>
+            <a:off x="11704320" y="21463508"/>
             <a:ext cx="9989820" cy="365760"/>
           </a:xfrm>
           <a:prstGeom prst="rect">
@@ -4882,7 +5134,7 @@
       </p:sp>
       <p:sp>
         <p:nvSpPr>
-          <p:cNvPr id="44" name="TextBox 43"/>
+          <p:cNvPr id="50" name="TextBox 49"/>
           <p:cNvSpPr txBox="1"/>
           <p:nvPr/>
         </p:nvSpPr>
@@ -4924,7 +5176,7 @@
       </p:sp>
       <p:sp>
         <p:nvSpPr>
-          <p:cNvPr id="45" name="Rectangle 44"/>
+          <p:cNvPr id="51" name="Rectangle 50"/>
           <p:cNvSpPr/>
           <p:nvPr/>
         </p:nvSpPr>
@@ -4968,7 +5220,7 @@
       </p:sp>
       <p:sp>
         <p:nvSpPr>
-          <p:cNvPr id="46" name="TextBox 45"/>
+          <p:cNvPr id="52" name="TextBox 51"/>
           <p:cNvSpPr txBox="1"/>
           <p:nvPr/>
         </p:nvSpPr>
@@ -5010,7 +5262,7 @@
       </p:sp>
       <p:sp>
         <p:nvSpPr>
-          <p:cNvPr id="47" name="TextBox 46"/>
+          <p:cNvPr id="53" name="TextBox 52"/>
           <p:cNvSpPr txBox="1"/>
           <p:nvPr/>
         </p:nvSpPr>
@@ -5052,7 +5304,7 @@
       </p:sp>
       <p:sp>
         <p:nvSpPr>
-          <p:cNvPr id="48" name="Rectangle 47"/>
+          <p:cNvPr id="54" name="Rectangle 53"/>
           <p:cNvSpPr/>
           <p:nvPr/>
         </p:nvSpPr>
@@ -5096,7 +5348,7 @@
       </p:sp>
       <p:sp>
         <p:nvSpPr>
-          <p:cNvPr id="49" name="TextBox 48"/>
+          <p:cNvPr id="55" name="TextBox 54"/>
           <p:cNvSpPr txBox="1"/>
           <p:nvPr/>
         </p:nvSpPr>
@@ -5138,7 +5390,7 @@
       </p:sp>
       <p:sp>
         <p:nvSpPr>
-          <p:cNvPr id="50" name="TextBox 49"/>
+          <p:cNvPr id="56" name="TextBox 55"/>
           <p:cNvSpPr txBox="1"/>
           <p:nvPr/>
         </p:nvSpPr>
@@ -5180,7 +5432,7 @@
       </p:sp>
       <p:sp>
         <p:nvSpPr>
-          <p:cNvPr id="51" name="Rectangle 50"/>
+          <p:cNvPr id="57" name="Rectangle 56"/>
           <p:cNvSpPr/>
           <p:nvPr/>
         </p:nvSpPr>
@@ -5224,7 +5476,7 @@
       </p:sp>
       <p:sp>
         <p:nvSpPr>
-          <p:cNvPr id="52" name="TextBox 51"/>
+          <p:cNvPr id="58" name="TextBox 57"/>
           <p:cNvSpPr txBox="1"/>
           <p:nvPr/>
         </p:nvSpPr>
@@ -5266,7 +5518,7 @@
       </p:sp>
       <p:sp>
         <p:nvSpPr>
-          <p:cNvPr id="53" name="TextBox 52"/>
+          <p:cNvPr id="59" name="TextBox 58"/>
           <p:cNvSpPr txBox="1"/>
           <p:nvPr/>
         </p:nvSpPr>
@@ -5308,7 +5560,7 @@
       </p:sp>
       <p:sp>
         <p:nvSpPr>
-          <p:cNvPr id="54" name="Rectangle 53"/>
+          <p:cNvPr id="60" name="Rectangle 59"/>
           <p:cNvSpPr/>
           <p:nvPr/>
         </p:nvSpPr>
@@ -5352,7 +5604,7 @@
       </p:sp>
       <p:sp>
         <p:nvSpPr>
-          <p:cNvPr id="55" name="TextBox 54"/>
+          <p:cNvPr id="61" name="TextBox 60"/>
           <p:cNvSpPr txBox="1"/>
           <p:nvPr/>
         </p:nvSpPr>
@@ -5394,7 +5646,7 @@
       </p:sp>
       <p:sp>
         <p:nvSpPr>
-          <p:cNvPr id="56" name="TextBox 55"/>
+          <p:cNvPr id="62" name="TextBox 61"/>
           <p:cNvSpPr txBox="1"/>
           <p:nvPr/>
         </p:nvSpPr>
@@ -5423,6 +5675,90 @@
               </a:spcAft>
             </a:pPr>
             <a:r>
+              <a:rPr sz="6200" b="1">
+                <a:solidFill>
+                  <a:srgbClr val="1C6FB5"/>
+                </a:solidFill>
+                <a:latin typeface="Times New Roman"/>
+              </a:rPr>
+              <a:t>26</a:t>
+            </a:r>
+          </a:p>
+        </p:txBody>
+      </p:sp>
+      <p:sp>
+        <p:nvSpPr>
+          <p:cNvPr id="63" name="TextBox 62"/>
+          <p:cNvSpPr txBox="1"/>
+          <p:nvPr/>
+        </p:nvSpPr>
+        <p:spPr>
+          <a:xfrm>
+            <a:off x="22059900" y="17720564"/>
+            <a:ext cx="9989820" cy="365760"/>
+          </a:xfrm>
+          <a:prstGeom prst="rect">
+            <a:avLst/>
+          </a:prstGeom>
+          <a:noFill/>
+        </p:spPr>
+        <p:txBody>
+          <a:bodyPr wrap="square" lIns="0" rIns="0" tIns="0" bIns="0">
+            <a:spAutoFit/>
+          </a:bodyPr>
+          <a:lstStyle/>
+          <a:p>
+            <a:pPr algn="l">
+              <a:lnSpc>
+                <a:spcPct val="122000"/>
+              </a:lnSpc>
+              <a:spcAft>
+                <a:spcPts val="600"/>
+              </a:spcAft>
+            </a:pPr>
+            <a:r>
+              <a:rPr sz="1600" b="0">
+                <a:solidFill>
+                  <a:srgbClr val="556575"/>
+                </a:solidFill>
+                <a:latin typeface="Arial"/>
+              </a:rPr>
+              <a:t>live drives diagnosed without being asked</a:t>
+            </a:r>
+          </a:p>
+        </p:txBody>
+      </p:sp>
+      <p:sp>
+        <p:nvSpPr>
+          <p:cNvPr id="64" name="TextBox 63"/>
+          <p:cNvSpPr txBox="1"/>
+          <p:nvPr/>
+        </p:nvSpPr>
+        <p:spPr>
+          <a:xfrm>
+            <a:off x="22059900" y="18190972"/>
+            <a:ext cx="9989820" cy="365760"/>
+          </a:xfrm>
+          <a:prstGeom prst="rect">
+            <a:avLst/>
+          </a:prstGeom>
+          <a:noFill/>
+        </p:spPr>
+        <p:txBody>
+          <a:bodyPr wrap="square" lIns="0" rIns="0" tIns="0" bIns="0">
+            <a:spAutoFit/>
+          </a:bodyPr>
+          <a:lstStyle/>
+          <a:p>
+            <a:pPr algn="l">
+              <a:lnSpc>
+                <a:spcPct val="95000"/>
+              </a:lnSpc>
+              <a:spcAft>
+                <a:spcPts val="0"/>
+              </a:spcAft>
+            </a:pPr>
+            <a:r>
               <a:rPr sz="3400" b="1">
                 <a:solidFill>
                   <a:srgbClr val="14314E"/>
@@ -5436,13 +5772,13 @@
       </p:sp>
       <p:sp>
         <p:nvSpPr>
-          <p:cNvPr id="57" name="Rectangle 56"/>
+          <p:cNvPr id="65" name="Rectangle 64"/>
           <p:cNvSpPr/>
           <p:nvPr/>
         </p:nvSpPr>
         <p:spPr>
           <a:xfrm>
-            <a:off x="22059900" y="17478756"/>
+            <a:off x="22059900" y="18752311"/>
             <a:ext cx="9989820" cy="27432"/>
           </a:xfrm>
           <a:prstGeom prst="rect">
@@ -5480,13 +5816,13 @@
       </p:sp>
       <p:sp>
         <p:nvSpPr>
-          <p:cNvPr id="58" name="TextBox 57"/>
+          <p:cNvPr id="66" name="TextBox 65"/>
           <p:cNvSpPr txBox="1"/>
           <p:nvPr/>
         </p:nvSpPr>
         <p:spPr>
           <a:xfrm>
-            <a:off x="22059900" y="17807940"/>
+            <a:off x="22059900" y="19081495"/>
             <a:ext cx="9989820" cy="365760"/>
           </a:xfrm>
           <a:prstGeom prst="rect">
@@ -5522,13 +5858,13 @@
       </p:sp>
       <p:sp>
         <p:nvSpPr>
-          <p:cNvPr id="59" name="TextBox 58"/>
+          <p:cNvPr id="67" name="TextBox 66"/>
           <p:cNvSpPr txBox="1"/>
           <p:nvPr/>
         </p:nvSpPr>
         <p:spPr>
           <a:xfrm>
-            <a:off x="22059900" y="19609308"/>
+            <a:off x="22059900" y="20882864"/>
             <a:ext cx="9989820" cy="365760"/>
           </a:xfrm>
           <a:prstGeom prst="rect">
@@ -5564,13 +5900,13 @@
       </p:sp>
       <p:sp>
         <p:nvSpPr>
-          <p:cNvPr id="60" name="Rectangle 59"/>
+          <p:cNvPr id="68" name="Rectangle 67"/>
           <p:cNvSpPr/>
           <p:nvPr/>
         </p:nvSpPr>
         <p:spPr>
           <a:xfrm>
-            <a:off x="22059900" y="20170648"/>
+            <a:off x="22059900" y="21444204"/>
             <a:ext cx="9989820" cy="27432"/>
           </a:xfrm>
           <a:prstGeom prst="rect">
@@ -5608,13 +5944,13 @@
       </p:sp>
       <p:sp>
         <p:nvSpPr>
-          <p:cNvPr id="61" name="TextBox 60"/>
+          <p:cNvPr id="69" name="TextBox 68"/>
           <p:cNvSpPr txBox="1"/>
           <p:nvPr/>
         </p:nvSpPr>
         <p:spPr>
           <a:xfrm>
-            <a:off x="22059900" y="20499832"/>
+            <a:off x="22059900" y="21773388"/>
             <a:ext cx="9989820" cy="365760"/>
           </a:xfrm>
           <a:prstGeom prst="rect">
@@ -5650,7 +5986,7 @@
       </p:sp>
       <p:sp>
         <p:nvSpPr>
-          <p:cNvPr id="62" name="TextBox 61"/>
+          <p:cNvPr id="70" name="TextBox 69"/>
           <p:cNvSpPr txBox="1"/>
           <p:nvPr/>
         </p:nvSpPr>
@@ -5679,6 +6015,90 @@
               </a:spcAft>
             </a:pPr>
             <a:r>
+              <a:rPr sz="6200" b="1">
+                <a:solidFill>
+                  <a:srgbClr val="1C6FB5"/>
+                </a:solidFill>
+                <a:latin typeface="Times New Roman"/>
+              </a:rPr>
+              <a:t>1,389</a:t>
+            </a:r>
+          </a:p>
+        </p:txBody>
+      </p:sp>
+      <p:sp>
+        <p:nvSpPr>
+          <p:cNvPr id="71" name="TextBox 70"/>
+          <p:cNvSpPr txBox="1"/>
+          <p:nvPr/>
+        </p:nvSpPr>
+        <p:spPr>
+          <a:xfrm>
+            <a:off x="32552640" y="6952996"/>
+            <a:ext cx="10607040" cy="365760"/>
+          </a:xfrm>
+          <a:prstGeom prst="rect">
+            <a:avLst/>
+          </a:prstGeom>
+          <a:noFill/>
+        </p:spPr>
+        <p:txBody>
+          <a:bodyPr wrap="square" lIns="0" rIns="0" tIns="0" bIns="0">
+            <a:spAutoFit/>
+          </a:bodyPr>
+          <a:lstStyle/>
+          <a:p>
+            <a:pPr algn="l">
+              <a:lnSpc>
+                <a:spcPct val="122000"/>
+              </a:lnSpc>
+              <a:spcAft>
+                <a:spcPts val="600"/>
+              </a:spcAft>
+            </a:pPr>
+            <a:r>
+              <a:rPr sz="1600" b="0">
+                <a:solidFill>
+                  <a:srgbClr val="556575"/>
+                </a:solidFill>
+                <a:latin typeface="Arial"/>
+              </a:rPr>
+              <a:t>joystick commands through the platform</a:t>
+            </a:r>
+          </a:p>
+        </p:txBody>
+      </p:sp>
+      <p:sp>
+        <p:nvSpPr>
+          <p:cNvPr id="72" name="TextBox 71"/>
+          <p:cNvSpPr txBox="1"/>
+          <p:nvPr/>
+        </p:nvSpPr>
+        <p:spPr>
+          <a:xfrm>
+            <a:off x="32552640" y="7423404"/>
+            <a:ext cx="10607040" cy="365760"/>
+          </a:xfrm>
+          <a:prstGeom prst="rect">
+            <a:avLst/>
+          </a:prstGeom>
+          <a:noFill/>
+        </p:spPr>
+        <p:txBody>
+          <a:bodyPr wrap="square" lIns="0" rIns="0" tIns="0" bIns="0">
+            <a:spAutoFit/>
+          </a:bodyPr>
+          <a:lstStyle/>
+          <a:p>
+            <a:pPr algn="l">
+              <a:lnSpc>
+                <a:spcPct val="95000"/>
+              </a:lnSpc>
+              <a:spcAft>
+                <a:spcPts val="0"/>
+              </a:spcAft>
+            </a:pPr>
+            <a:r>
               <a:rPr sz="3400" b="1">
                 <a:solidFill>
                   <a:srgbClr val="14314E"/>
@@ -5692,13 +6112,13 @@
       </p:sp>
       <p:sp>
         <p:nvSpPr>
-          <p:cNvPr id="63" name="Rectangle 62"/>
+          <p:cNvPr id="73" name="Rectangle 72"/>
           <p:cNvSpPr/>
           <p:nvPr/>
         </p:nvSpPr>
         <p:spPr>
           <a:xfrm>
-            <a:off x="32552640" y="6711188"/>
+            <a:off x="32552640" y="7984744"/>
             <a:ext cx="10607040" cy="27432"/>
           </a:xfrm>
           <a:prstGeom prst="rect">
@@ -5736,13 +6156,13 @@
       </p:sp>
       <p:sp>
         <p:nvSpPr>
-          <p:cNvPr id="64" name="TextBox 63"/>
+          <p:cNvPr id="74" name="TextBox 73"/>
           <p:cNvSpPr txBox="1"/>
           <p:nvPr/>
         </p:nvSpPr>
         <p:spPr>
           <a:xfrm>
-            <a:off x="32552640" y="7040372"/>
+            <a:off x="32552640" y="8313928"/>
             <a:ext cx="10607040" cy="365760"/>
           </a:xfrm>
           <a:prstGeom prst="rect">
@@ -5778,13 +6198,13 @@
       </p:sp>
       <p:sp>
         <p:nvSpPr>
-          <p:cNvPr id="65" name="TextBox 64"/>
+          <p:cNvPr id="75" name="TextBox 74"/>
           <p:cNvSpPr txBox="1"/>
           <p:nvPr/>
         </p:nvSpPr>
         <p:spPr>
           <a:xfrm>
-            <a:off x="32552640" y="9151620"/>
+            <a:off x="32552640" y="10425176"/>
             <a:ext cx="10607040" cy="365760"/>
           </a:xfrm>
           <a:prstGeom prst="rect">
@@ -5820,13 +6240,13 @@
       </p:sp>
       <p:sp>
         <p:nvSpPr>
-          <p:cNvPr id="66" name="Rectangle 65"/>
+          <p:cNvPr id="76" name="Rectangle 75"/>
           <p:cNvSpPr/>
           <p:nvPr/>
         </p:nvSpPr>
         <p:spPr>
           <a:xfrm>
-            <a:off x="32552640" y="9712960"/>
+            <a:off x="32552640" y="10986516"/>
             <a:ext cx="10607040" cy="27432"/>
           </a:xfrm>
           <a:prstGeom prst="rect">
@@ -5864,13 +6284,13 @@
       </p:sp>
       <p:sp>
         <p:nvSpPr>
-          <p:cNvPr id="67" name="TextBox 66"/>
+          <p:cNvPr id="77" name="TextBox 76"/>
           <p:cNvSpPr txBox="1"/>
           <p:nvPr/>
         </p:nvSpPr>
         <p:spPr>
           <a:xfrm>
-            <a:off x="32552640" y="10042144"/>
+            <a:off x="32552640" y="11315700"/>
             <a:ext cx="10607040" cy="365760"/>
           </a:xfrm>
           <a:prstGeom prst="rect">
@@ -5906,13 +6326,13 @@
       </p:sp>
       <p:sp>
         <p:nvSpPr>
-          <p:cNvPr id="68" name="TextBox 67"/>
+          <p:cNvPr id="78" name="TextBox 77"/>
           <p:cNvSpPr txBox="1"/>
           <p:nvPr/>
         </p:nvSpPr>
         <p:spPr>
           <a:xfrm>
-            <a:off x="32552640" y="11843511"/>
+            <a:off x="32552640" y="13117068"/>
             <a:ext cx="10607040" cy="365760"/>
           </a:xfrm>
           <a:prstGeom prst="rect">
@@ -5948,13 +6368,13 @@
       </p:sp>
       <p:sp>
         <p:nvSpPr>
-          <p:cNvPr id="69" name="Rectangle 68"/>
+          <p:cNvPr id="79" name="Rectangle 78"/>
           <p:cNvSpPr/>
           <p:nvPr/>
         </p:nvSpPr>
         <p:spPr>
           <a:xfrm>
-            <a:off x="32552640" y="12404851"/>
+            <a:off x="32552640" y="13678408"/>
             <a:ext cx="10607040" cy="27432"/>
           </a:xfrm>
           <a:prstGeom prst="rect">
@@ -5992,13 +6412,13 @@
       </p:sp>
       <p:sp>
         <p:nvSpPr>
-          <p:cNvPr id="70" name="TextBox 69"/>
+          <p:cNvPr id="80" name="TextBox 79"/>
           <p:cNvSpPr txBox="1"/>
           <p:nvPr/>
         </p:nvSpPr>
         <p:spPr>
           <a:xfrm>
-            <a:off x="32552640" y="12734035"/>
+            <a:off x="32552640" y="14007592"/>
             <a:ext cx="10607040" cy="365760"/>
           </a:xfrm>
           <a:prstGeom prst="rect">
@@ -6034,13 +6454,13 @@
       </p:sp>
       <p:sp>
         <p:nvSpPr>
-          <p:cNvPr id="71" name="TextBox 70"/>
+          <p:cNvPr id="81" name="TextBox 80"/>
           <p:cNvSpPr txBox="1"/>
           <p:nvPr/>
         </p:nvSpPr>
         <p:spPr>
           <a:xfrm>
-            <a:off x="32552640" y="14535403"/>
+            <a:off x="32552640" y="15808960"/>
             <a:ext cx="10607040" cy="365760"/>
           </a:xfrm>
           <a:prstGeom prst="rect">
@@ -6076,13 +6496,13 @@
       </p:sp>
       <p:sp>
         <p:nvSpPr>
-          <p:cNvPr id="72" name="Rectangle 71"/>
+          <p:cNvPr id="82" name="Rectangle 81"/>
           <p:cNvSpPr/>
           <p:nvPr/>
         </p:nvSpPr>
         <p:spPr>
           <a:xfrm>
-            <a:off x="32552640" y="15096743"/>
+            <a:off x="32552640" y="16370300"/>
             <a:ext cx="10607040" cy="27432"/>
           </a:xfrm>
           <a:prstGeom prst="rect">
@@ -6120,13 +6540,13 @@
       </p:sp>
       <p:sp>
         <p:nvSpPr>
-          <p:cNvPr id="73" name="TextBox 72"/>
+          <p:cNvPr id="83" name="TextBox 82"/>
           <p:cNvSpPr txBox="1"/>
           <p:nvPr/>
         </p:nvSpPr>
         <p:spPr>
           <a:xfrm>
-            <a:off x="32552640" y="15425927"/>
+            <a:off x="32552640" y="16699484"/>
             <a:ext cx="10607040" cy="365760"/>
           </a:xfrm>
           <a:prstGeom prst="rect">
@@ -6162,13 +6582,13 @@
       </p:sp>
       <p:sp>
         <p:nvSpPr>
-          <p:cNvPr id="74" name="TextBox 73"/>
+          <p:cNvPr id="84" name="TextBox 83"/>
           <p:cNvSpPr txBox="1"/>
           <p:nvPr/>
         </p:nvSpPr>
         <p:spPr>
           <a:xfrm>
-            <a:off x="32552640" y="17227296"/>
+            <a:off x="32552640" y="18500852"/>
             <a:ext cx="10607040" cy="365760"/>
           </a:xfrm>
           <a:prstGeom prst="rect">
@@ -6191,6 +6611,90 @@
               </a:spcAft>
             </a:pPr>
             <a:r>
+              <a:rPr sz="6200" b="1">
+                <a:solidFill>
+                  <a:srgbClr val="1C6FB5"/>
+                </a:solidFill>
+                <a:latin typeface="Times New Roman"/>
+              </a:rPr>
+              <a:t>0</a:t>
+            </a:r>
+          </a:p>
+        </p:txBody>
+      </p:sp>
+      <p:sp>
+        <p:nvSpPr>
+          <p:cNvPr id="85" name="TextBox 84"/>
+          <p:cNvSpPr txBox="1"/>
+          <p:nvPr/>
+        </p:nvSpPr>
+        <p:spPr>
+          <a:xfrm>
+            <a:off x="32552640" y="19304000"/>
+            <a:ext cx="10607040" cy="365760"/>
+          </a:xfrm>
+          <a:prstGeom prst="rect">
+            <a:avLst/>
+          </a:prstGeom>
+          <a:noFill/>
+        </p:spPr>
+        <p:txBody>
+          <a:bodyPr wrap="square" lIns="0" rIns="0" tIns="0" bIns="0">
+            <a:spAutoFit/>
+          </a:bodyPr>
+          <a:lstStyle/>
+          <a:p>
+            <a:pPr algn="l">
+              <a:lnSpc>
+                <a:spcPct val="122000"/>
+              </a:lnSpc>
+              <a:spcAft>
+                <a:spcPts val="600"/>
+              </a:spcAft>
+            </a:pPr>
+            <a:r>
+              <a:rPr sz="1600" b="0">
+                <a:solidFill>
+                  <a:srgbClr val="556575"/>
+                </a:solidFill>
+                <a:latin typeface="Arial"/>
+              </a:rPr>
+              <a:t>times the laser has been fired by the platform</a:t>
+            </a:r>
+          </a:p>
+        </p:txBody>
+      </p:sp>
+      <p:sp>
+        <p:nvSpPr>
+          <p:cNvPr id="86" name="TextBox 85"/>
+          <p:cNvSpPr txBox="1"/>
+          <p:nvPr/>
+        </p:nvSpPr>
+        <p:spPr>
+          <a:xfrm>
+            <a:off x="32552640" y="19774408"/>
+            <a:ext cx="10607040" cy="365760"/>
+          </a:xfrm>
+          <a:prstGeom prst="rect">
+            <a:avLst/>
+          </a:prstGeom>
+          <a:noFill/>
+        </p:spPr>
+        <p:txBody>
+          <a:bodyPr wrap="square" lIns="0" rIns="0" tIns="0" bIns="0">
+            <a:spAutoFit/>
+          </a:bodyPr>
+          <a:lstStyle/>
+          <a:p>
+            <a:pPr algn="l">
+              <a:lnSpc>
+                <a:spcPct val="95000"/>
+              </a:lnSpc>
+              <a:spcAft>
+                <a:spcPts val="0"/>
+              </a:spcAft>
+            </a:pPr>
+            <a:r>
               <a:rPr sz="3400" b="1">
                 <a:solidFill>
                   <a:srgbClr val="14314E"/>
@@ -6204,13 +6708,13 @@
       </p:sp>
       <p:sp>
         <p:nvSpPr>
-          <p:cNvPr id="75" name="Rectangle 74"/>
+          <p:cNvPr id="87" name="Rectangle 86"/>
           <p:cNvSpPr/>
           <p:nvPr/>
         </p:nvSpPr>
         <p:spPr>
           <a:xfrm>
-            <a:off x="32552640" y="17788636"/>
+            <a:off x="32552640" y="20335748"/>
             <a:ext cx="10607040" cy="27432"/>
           </a:xfrm>
           <a:prstGeom prst="rect">
@@ -6248,13 +6752,13 @@
       </p:sp>
       <p:sp>
         <p:nvSpPr>
-          <p:cNvPr id="76" name="TextBox 75"/>
+          <p:cNvPr id="88" name="TextBox 87"/>
           <p:cNvSpPr txBox="1"/>
           <p:nvPr/>
         </p:nvSpPr>
         <p:spPr>
           <a:xfrm>
-            <a:off x="32552640" y="18117820"/>
+            <a:off x="32552640" y="20664932"/>
             <a:ext cx="10607040" cy="365760"/>
           </a:xfrm>
           <a:prstGeom prst="rect">
@@ -6290,7 +6794,7 @@
       </p:sp>
       <p:sp>
         <p:nvSpPr>
-          <p:cNvPr id="77" name="Rectangle 76"/>
+          <p:cNvPr id="89" name="Rectangle 88"/>
           <p:cNvSpPr/>
           <p:nvPr/>
         </p:nvSpPr>
@@ -6334,7 +6838,7 @@
       </p:sp>
       <p:sp>
         <p:nvSpPr>
-          <p:cNvPr id="78" name="TextBox 77"/>
+          <p:cNvPr id="90" name="TextBox 89"/>
           <p:cNvSpPr txBox="1"/>
           <p:nvPr/>
         </p:nvSpPr>
@@ -6376,7 +6880,7 @@
       </p:sp>
       <p:sp>
         <p:nvSpPr>
-          <p:cNvPr id="79" name="TextBox 78"/>
+          <p:cNvPr id="91" name="TextBox 90"/>
           <p:cNvSpPr txBox="1"/>
           <p:nvPr/>
         </p:nvSpPr>
@@ -6418,7 +6922,7 @@
       </p:sp>
       <p:sp>
         <p:nvSpPr>
-          <p:cNvPr id="80" name="TextBox 79"/>
+          <p:cNvPr id="92" name="TextBox 91"/>
           <p:cNvSpPr txBox="1"/>
           <p:nvPr/>
         </p:nvSpPr>
